--- a/FRETE_CLICK.pptx
+++ b/FRETE_CLICK.pptx
@@ -143,13 +143,10 @@
           </c:spPr>
           <c:cat>
             <c:strRef>
-              <c:f>Sheet1!$A$2:$A$3</c:f>
+              <c:f>Sheet1!$A$2:$A$2</c:f>
               <c:strCache>
-                <c:ptCount val="2"/>
+                <c:ptCount val="1"/>
                 <c:pt idx="0">
-                  <c:v>Abril 2026</c:v>
-                </c:pt>
-                <c:pt idx="1">
                   <c:v>Maio 2026</c:v>
                 </c:pt>
               </c:strCache>
@@ -157,15 +154,12 @@
           </c:cat>
           <c:val>
             <c:numRef>
-              <c:f>Sheet1!$B$2:$B$3</c:f>
+              <c:f>Sheet1!$B$2:$B$2</c:f>
               <c:numCache>
                 <c:formatCode>General</c:formatCode>
-                <c:ptCount val="2"/>
+                <c:ptCount val="1"/>
                 <c:pt idx="0">
-                  <c:v>0</c:v>
-                </c:pt>
-                <c:pt idx="1">
-                  <c:v>28</c:v>
+                  <c:v>60</c:v>
                 </c:pt>
               </c:numCache>
             </c:numRef>
@@ -192,13 +186,10 @@
           </c:spPr>
           <c:cat>
             <c:strRef>
-              <c:f>Sheet1!$A$2:$A$3</c:f>
+              <c:f>Sheet1!$A$2:$A$2</c:f>
               <c:strCache>
-                <c:ptCount val="2"/>
+                <c:ptCount val="1"/>
                 <c:pt idx="0">
-                  <c:v>Abril 2026</c:v>
-                </c:pt>
-                <c:pt idx="1">
                   <c:v>Maio 2026</c:v>
                 </c:pt>
               </c:strCache>
@@ -206,15 +197,12 @@
           </c:cat>
           <c:val>
             <c:numRef>
-              <c:f>Sheet1!$C$2:$C$3</c:f>
+              <c:f>Sheet1!$C$2:$C$2</c:f>
               <c:numCache>
                 <c:formatCode>General</c:formatCode>
-                <c:ptCount val="2"/>
+                <c:ptCount val="1"/>
                 <c:pt idx="0">
-                  <c:v>0</c:v>
-                </c:pt>
-                <c:pt idx="1">
-                  <c:v>3</c:v>
+                  <c:v>5</c:v>
                 </c:pt>
               </c:numCache>
             </c:numRef>
@@ -3494,14 +3482,13 @@
           <a:p>
             <a:pPr algn="ctr"/>
             <a:r>
-              <a:rPr sz="1600" b="1">
+              <a:rPr sz="1400" b="1">
                 <a:solidFill>
                   <a:srgbClr val="FFFFFF"/>
                 </a:solidFill>
                 <a:latin typeface="Calibri"/>
               </a:rPr>
-              <a:t>Nossa rota e ir alem das
-entregas!</a:t>
+              <a:t>Nossa rota e ir alem das entregas!</a:t>
             </a:r>
           </a:p>
         </p:txBody>
@@ -3709,7 +3696,7 @@
                 </a:solidFill>
                 <a:latin typeface="Calibri"/>
               </a:rPr>
-              <a:t>31</a:t>
+              <a:t>65</a:t>
             </a:r>
           </a:p>
         </p:txBody>
@@ -3824,7 +3811,7 @@
                 </a:solidFill>
                 <a:latin typeface="Calibri"/>
               </a:rPr>
-              <a:t>28</a:t>
+              <a:t>60</a:t>
             </a:r>
           </a:p>
         </p:txBody>
@@ -3939,7 +3926,7 @@
                 </a:solidFill>
                 <a:latin typeface="Calibri"/>
               </a:rPr>
-              <a:t>3</a:t>
+              <a:t>5</a:t>
             </a:r>
           </a:p>
         </p:txBody>
@@ -4054,7 +4041,7 @@
                 </a:solidFill>
                 <a:latin typeface="Calibri"/>
               </a:rPr>
-              <a:t>90.3%</a:t>
+              <a:t>92.3%</a:t>
             </a:r>
           </a:p>
         </p:txBody>
@@ -4249,7 +4236,7 @@
                           </a:solidFill>
                           <a:latin typeface="Calibri"/>
                         </a:rPr>
-                        <a:t>0</a:t>
+                        <a:t>-</a:t>
                       </a:r>
                     </a:p>
                   </a:txBody>
@@ -4272,7 +4259,7 @@
                           </a:solidFill>
                           <a:latin typeface="Calibri"/>
                         </a:rPr>
-                        <a:t>31</a:t>
+                        <a:t>65</a:t>
                       </a:r>
                     </a:p>
                   </a:txBody>
@@ -4295,7 +4282,7 @@
                           </a:solidFill>
                           <a:latin typeface="Calibri"/>
                         </a:rPr>
-                        <a:t>+ 31</a:t>
+                        <a:t>-</a:t>
                       </a:r>
                     </a:p>
                   </a:txBody>
@@ -4343,7 +4330,7 @@
                           </a:solidFill>
                           <a:latin typeface="Calibri"/>
                         </a:rPr>
-                        <a:t>0</a:t>
+                        <a:t>-</a:t>
                       </a:r>
                     </a:p>
                   </a:txBody>
@@ -4366,7 +4353,7 @@
                           </a:solidFill>
                           <a:latin typeface="Calibri"/>
                         </a:rPr>
-                        <a:t>28</a:t>
+                        <a:t>60</a:t>
                       </a:r>
                     </a:p>
                   </a:txBody>
@@ -4389,7 +4376,7 @@
                           </a:solidFill>
                           <a:latin typeface="Calibri"/>
                         </a:rPr>
-                        <a:t>+ 28</a:t>
+                        <a:t>-</a:t>
                       </a:r>
                     </a:p>
                   </a:txBody>
@@ -4437,7 +4424,7 @@
                           </a:solidFill>
                           <a:latin typeface="Calibri"/>
                         </a:rPr>
-                        <a:t>0</a:t>
+                        <a:t>-</a:t>
                       </a:r>
                     </a:p>
                   </a:txBody>
@@ -4460,7 +4447,7 @@
                           </a:solidFill>
                           <a:latin typeface="Calibri"/>
                         </a:rPr>
-                        <a:t>3</a:t>
+                        <a:t>5</a:t>
                       </a:r>
                     </a:p>
                   </a:txBody>
@@ -4483,7 +4470,7 @@
                           </a:solidFill>
                           <a:latin typeface="Calibri"/>
                         </a:rPr>
-                        <a:t>+ 3</a:t>
+                        <a:t>-</a:t>
                       </a:r>
                     </a:p>
                   </a:txBody>
@@ -4531,7 +4518,7 @@
                           </a:solidFill>
                           <a:latin typeface="Calibri"/>
                         </a:rPr>
-                        <a:t>90.3%</a:t>
+                        <a:t>92.3%</a:t>
                       </a:r>
                     </a:p>
                   </a:txBody>
@@ -4554,7 +4541,7 @@
                           </a:solidFill>
                           <a:latin typeface="Calibri"/>
                         </a:rPr>
-                        <a:t>90.3%</a:t>
+                        <a:t>92.3%</a:t>
                       </a:r>
                     </a:p>
                   </a:txBody>
@@ -4748,7 +4735,7 @@
         </p:nvGraphicFramePr>
         <p:xfrm>
           <a:off x="7955279" y="2286000"/>
-          <a:ext cx="4480560" cy="1316736"/>
+          <a:ext cx="4480560" cy="877824"/>
         </p:xfrm>
         <a:graphic>
           <a:graphicData uri="http://schemas.openxmlformats.org/drawingml/2006/table">
@@ -4894,7 +4881,7 @@
                           </a:solidFill>
                           <a:latin typeface="Calibri"/>
                         </a:rPr>
-                        <a:t>Abril 2026</a:t>
+                        <a:t>Maio 2026</a:t>
                       </a:r>
                     </a:p>
                   </a:txBody>
@@ -4917,7 +4904,7 @@
                           </a:solidFill>
                           <a:latin typeface="Calibri"/>
                         </a:rPr>
-                        <a:t>0</a:t>
+                        <a:t>65</a:t>
                       </a:r>
                     </a:p>
                   </a:txBody>
@@ -4940,7 +4927,7 @@
                           </a:solidFill>
                           <a:latin typeface="Calibri"/>
                         </a:rPr>
-                        <a:t>0</a:t>
+                        <a:t>60</a:t>
                       </a:r>
                     </a:p>
                   </a:txBody>
@@ -4963,7 +4950,7 @@
                           </a:solidFill>
                           <a:latin typeface="Calibri"/>
                         </a:rPr>
-                        <a:t>0</a:t>
+                        <a:t>5</a:t>
                       </a:r>
                     </a:p>
                   </a:txBody>
@@ -4986,130 +4973,13 @@
                           </a:solidFill>
                           <a:latin typeface="Calibri"/>
                         </a:rPr>
-                        <a:t>90.3%</a:t>
+                        <a:t>92.3%</a:t>
                       </a:r>
                     </a:p>
                   </a:txBody>
                   <a:tcPr>
                     <a:solidFill>
                       <a:srgbClr val="FFFFFF"/>
-                    </a:solidFill>
-                  </a:tcPr>
-                </a:tc>
-              </a:tr>
-              <a:tr h="438912">
-                <a:tc>
-                  <a:txBody>
-                    <a:bodyPr/>
-                    <a:lstStyle/>
-                    <a:p>
-                      <a:pPr algn="l"/>
-                      <a:r>
-                        <a:rPr sz="1000" b="0">
-                          <a:solidFill>
-                            <a:srgbClr val="1D1B43"/>
-                          </a:solidFill>
-                          <a:latin typeface="Calibri"/>
-                        </a:rPr>
-                        <a:t>Maio 2026</a:t>
-                      </a:r>
-                    </a:p>
-                  </a:txBody>
-                  <a:tcPr>
-                    <a:solidFill>
-                      <a:srgbClr val="F2F2F2"/>
-                    </a:solidFill>
-                  </a:tcPr>
-                </a:tc>
-                <a:tc>
-                  <a:txBody>
-                    <a:bodyPr/>
-                    <a:lstStyle/>
-                    <a:p>
-                      <a:pPr algn="l"/>
-                      <a:r>
-                        <a:rPr sz="1000" b="0">
-                          <a:solidFill>
-                            <a:srgbClr val="1D1B43"/>
-                          </a:solidFill>
-                          <a:latin typeface="Calibri"/>
-                        </a:rPr>
-                        <a:t>31</a:t>
-                      </a:r>
-                    </a:p>
-                  </a:txBody>
-                  <a:tcPr>
-                    <a:solidFill>
-                      <a:srgbClr val="F2F2F2"/>
-                    </a:solidFill>
-                  </a:tcPr>
-                </a:tc>
-                <a:tc>
-                  <a:txBody>
-                    <a:bodyPr/>
-                    <a:lstStyle/>
-                    <a:p>
-                      <a:pPr algn="l"/>
-                      <a:r>
-                        <a:rPr sz="1000" b="0">
-                          <a:solidFill>
-                            <a:srgbClr val="1D1B43"/>
-                          </a:solidFill>
-                          <a:latin typeface="Calibri"/>
-                        </a:rPr>
-                        <a:t>28</a:t>
-                      </a:r>
-                    </a:p>
-                  </a:txBody>
-                  <a:tcPr>
-                    <a:solidFill>
-                      <a:srgbClr val="F2F2F2"/>
-                    </a:solidFill>
-                  </a:tcPr>
-                </a:tc>
-                <a:tc>
-                  <a:txBody>
-                    <a:bodyPr/>
-                    <a:lstStyle/>
-                    <a:p>
-                      <a:pPr algn="l"/>
-                      <a:r>
-                        <a:rPr sz="1000" b="0">
-                          <a:solidFill>
-                            <a:srgbClr val="1D1B43"/>
-                          </a:solidFill>
-                          <a:latin typeface="Calibri"/>
-                        </a:rPr>
-                        <a:t>3</a:t>
-                      </a:r>
-                    </a:p>
-                  </a:txBody>
-                  <a:tcPr>
-                    <a:solidFill>
-                      <a:srgbClr val="F2F2F2"/>
-                    </a:solidFill>
-                  </a:tcPr>
-                </a:tc>
-                <a:tc>
-                  <a:txBody>
-                    <a:bodyPr/>
-                    <a:lstStyle/>
-                    <a:p>
-                      <a:pPr algn="l"/>
-                      <a:r>
-                        <a:rPr sz="1000" b="0">
-                          <a:solidFill>
-                            <a:srgbClr val="1D1B43"/>
-                          </a:solidFill>
-                          <a:latin typeface="Calibri"/>
-                        </a:rPr>
-                        <a:t>90.3%</a:t>
-                      </a:r>
-                    </a:p>
-                  </a:txBody>
-                  <a:tcPr>
-                    <a:solidFill>
-                      <a:srgbClr val="F2F2F2"/>
                     </a:solidFill>
                   </a:tcPr>
                 </a:tc>
@@ -5191,7 +5061,7 @@
                 </a:solidFill>
                 <a:latin typeface="Calibri"/>
               </a:rPr>
-              <a:t>PERFORMANCE: 90.3% - REGULAR</a:t>
+              <a:t>PERFORMANCE: 92.3% - REGULAR</a:t>
             </a:r>
           </a:p>
         </p:txBody>
@@ -5276,7 +5146,7 @@
                 </a:solidFill>
                 <a:latin typeface="Calibri"/>
               </a:rPr>
-              <a:t>OCORRENCIAS FORA DO PRAZO (3)</a:t>
+              <a:t>OCORRENCIAS FORA DO PRAZO (5)</a:t>
             </a:r>
           </a:p>
         </p:txBody>
@@ -5334,7 +5204,7 @@
         </p:nvGraphicFramePr>
         <p:xfrm>
           <a:off x="457200" y="1828800"/>
-          <a:ext cx="11429999" cy="1536192"/>
+          <a:ext cx="11429999" cy="2304288"/>
         </p:xfrm>
         <a:graphic>
           <a:graphicData uri="http://schemas.openxmlformats.org/drawingml/2006/table">
@@ -5807,6 +5677,240 @@
                           <a:latin typeface="Calibri"/>
                         </a:rPr>
                         <a:t>ENTREGUE FORA DO PRAZO</a:t>
+                      </a:r>
+                    </a:p>
+                  </a:txBody>
+                  <a:tcPr>
+                    <a:solidFill>
+                      <a:srgbClr val="FFFFFF"/>
+                    </a:solidFill>
+                  </a:tcPr>
+                </a:tc>
+              </a:tr>
+              <a:tr h="384048">
+                <a:tc>
+                  <a:txBody>
+                    <a:bodyPr/>
+                    <a:lstStyle/>
+                    <a:p>
+                      <a:pPr algn="l"/>
+                      <a:r>
+                        <a:rPr sz="1000" b="0">
+                          <a:solidFill>
+                            <a:srgbClr val="1D1B43"/>
+                          </a:solidFill>
+                          <a:latin typeface="Calibri"/>
+                        </a:rPr>
+                        <a:t>285197</a:t>
+                      </a:r>
+                    </a:p>
+                  </a:txBody>
+                  <a:tcPr>
+                    <a:solidFill>
+                      <a:srgbClr val="F2F2F2"/>
+                    </a:solidFill>
+                  </a:tcPr>
+                </a:tc>
+                <a:tc>
+                  <a:txBody>
+                    <a:bodyPr/>
+                    <a:lstStyle/>
+                    <a:p>
+                      <a:pPr algn="l"/>
+                      <a:r>
+                        <a:rPr sz="1000" b="0">
+                          <a:solidFill>
+                            <a:srgbClr val="1D1B43"/>
+                          </a:solidFill>
+                          <a:latin typeface="Calibri"/>
+                        </a:rPr>
+                        <a:t>FLAVIO - SAO PAULO / SP</a:t>
+                      </a:r>
+                    </a:p>
+                  </a:txBody>
+                  <a:tcPr>
+                    <a:solidFill>
+                      <a:srgbClr val="F2F2F2"/>
+                    </a:solidFill>
+                  </a:tcPr>
+                </a:tc>
+                <a:tc>
+                  <a:txBody>
+                    <a:bodyPr/>
+                    <a:lstStyle/>
+                    <a:p>
+                      <a:pPr algn="l"/>
+                      <a:r>
+                        <a:rPr sz="1000" b="0">
+                          <a:solidFill>
+                            <a:srgbClr val="1D1B43"/>
+                          </a:solidFill>
+                          <a:latin typeface="Calibri"/>
+                        </a:rPr>
+                        <a:t>SAO PAULO/SP</a:t>
+                      </a:r>
+                    </a:p>
+                  </a:txBody>
+                  <a:tcPr>
+                    <a:solidFill>
+                      <a:srgbClr val="F2F2F2"/>
+                    </a:solidFill>
+                  </a:tcPr>
+                </a:tc>
+                <a:tc>
+                  <a:txBody>
+                    <a:bodyPr/>
+                    <a:lstStyle/>
+                    <a:p>
+                      <a:pPr algn="l"/>
+                      <a:r>
+                        <a:rPr sz="1000" b="0">
+                          <a:solidFill>
+                            <a:srgbClr val="1D1B43"/>
+                          </a:solidFill>
+                          <a:latin typeface="Calibri"/>
+                        </a:rPr>
+                        <a:t>28/05/2026</a:t>
+                      </a:r>
+                    </a:p>
+                  </a:txBody>
+                  <a:tcPr>
+                    <a:solidFill>
+                      <a:srgbClr val="F2F2F2"/>
+                    </a:solidFill>
+                  </a:tcPr>
+                </a:tc>
+                <a:tc>
+                  <a:txBody>
+                    <a:bodyPr/>
+                    <a:lstStyle/>
+                    <a:p>
+                      <a:pPr algn="l"/>
+                      <a:r>
+                        <a:rPr sz="1000" b="0">
+                          <a:solidFill>
+                            <a:srgbClr val="1D1B43"/>
+                          </a:solidFill>
+                          <a:latin typeface="Calibri"/>
+                        </a:rPr>
+                        <a:t>FORA DO PRAZO</a:t>
+                      </a:r>
+                    </a:p>
+                  </a:txBody>
+                  <a:tcPr>
+                    <a:solidFill>
+                      <a:srgbClr val="F2F2F2"/>
+                    </a:solidFill>
+                  </a:tcPr>
+                </a:tc>
+              </a:tr>
+              <a:tr h="384048">
+                <a:tc>
+                  <a:txBody>
+                    <a:bodyPr/>
+                    <a:lstStyle/>
+                    <a:p>
+                      <a:pPr algn="l"/>
+                      <a:r>
+                        <a:rPr sz="1000" b="0">
+                          <a:solidFill>
+                            <a:srgbClr val="1D1B43"/>
+                          </a:solidFill>
+                          <a:latin typeface="Calibri"/>
+                        </a:rPr>
+                        <a:t>285209</a:t>
+                      </a:r>
+                    </a:p>
+                  </a:txBody>
+                  <a:tcPr>
+                    <a:solidFill>
+                      <a:srgbClr val="FFFFFF"/>
+                    </a:solidFill>
+                  </a:tcPr>
+                </a:tc>
+                <a:tc>
+                  <a:txBody>
+                    <a:bodyPr/>
+                    <a:lstStyle/>
+                    <a:p>
+                      <a:pPr algn="l"/>
+                      <a:r>
+                        <a:rPr sz="1000" b="0">
+                          <a:solidFill>
+                            <a:srgbClr val="1D1B43"/>
+                          </a:solidFill>
+                          <a:latin typeface="Calibri"/>
+                        </a:rPr>
+                        <a:t>GABRIEL ANTONIO SERA - SAO PAULO / SP</a:t>
+                      </a:r>
+                    </a:p>
+                  </a:txBody>
+                  <a:tcPr>
+                    <a:solidFill>
+                      <a:srgbClr val="FFFFFF"/>
+                    </a:solidFill>
+                  </a:tcPr>
+                </a:tc>
+                <a:tc>
+                  <a:txBody>
+                    <a:bodyPr/>
+                    <a:lstStyle/>
+                    <a:p>
+                      <a:pPr algn="l"/>
+                      <a:r>
+                        <a:rPr sz="1000" b="0">
+                          <a:solidFill>
+                            <a:srgbClr val="1D1B43"/>
+                          </a:solidFill>
+                          <a:latin typeface="Calibri"/>
+                        </a:rPr>
+                        <a:t>SAO PAULO/SP</a:t>
+                      </a:r>
+                    </a:p>
+                  </a:txBody>
+                  <a:tcPr>
+                    <a:solidFill>
+                      <a:srgbClr val="FFFFFF"/>
+                    </a:solidFill>
+                  </a:tcPr>
+                </a:tc>
+                <a:tc>
+                  <a:txBody>
+                    <a:bodyPr/>
+                    <a:lstStyle/>
+                    <a:p>
+                      <a:pPr algn="l"/>
+                      <a:r>
+                        <a:rPr sz="1000" b="0">
+                          <a:solidFill>
+                            <a:srgbClr val="1D1B43"/>
+                          </a:solidFill>
+                          <a:latin typeface="Calibri"/>
+                        </a:rPr>
+                        <a:t>28/05/2026</a:t>
+                      </a:r>
+                    </a:p>
+                  </a:txBody>
+                  <a:tcPr>
+                    <a:solidFill>
+                      <a:srgbClr val="FFFFFF"/>
+                    </a:solidFill>
+                  </a:tcPr>
+                </a:tc>
+                <a:tc>
+                  <a:txBody>
+                    <a:bodyPr/>
+                    <a:lstStyle/>
+                    <a:p>
+                      <a:pPr algn="l"/>
+                      <a:r>
+                        <a:rPr sz="1000" b="0">
+                          <a:solidFill>
+                            <a:srgbClr val="1D1B43"/>
+                          </a:solidFill>
+                          <a:latin typeface="Calibri"/>
+                        </a:rPr>
+                        <a:t>FORA DO PRAZO</a:t>
                       </a:r>
                     </a:p>
                   </a:txBody>
@@ -6152,7 +6256,7 @@
                           </a:solidFill>
                           <a:latin typeface="Calibri"/>
                         </a:rPr>
-                        <a:t>24</a:t>
+                        <a:t>50</a:t>
                       </a:r>
                     </a:p>
                   </a:txBody>
@@ -6175,7 +6279,7 @@
                           </a:solidFill>
                           <a:latin typeface="Calibri"/>
                         </a:rPr>
-                        <a:t>21</a:t>
+                        <a:t>45</a:t>
                       </a:r>
                     </a:p>
                   </a:txBody>
@@ -6198,7 +6302,7 @@
                           </a:solidFill>
                           <a:latin typeface="Calibri"/>
                         </a:rPr>
-                        <a:t>3</a:t>
+                        <a:t>5</a:t>
                       </a:r>
                     </a:p>
                   </a:txBody>
@@ -6221,7 +6325,7 @@
                           </a:solidFill>
                           <a:latin typeface="Calibri"/>
                         </a:rPr>
-                        <a:t>87.5%</a:t>
+                        <a:t>90.0%</a:t>
                       </a:r>
                     </a:p>
                   </a:txBody>
@@ -6292,7 +6396,7 @@
                           </a:solidFill>
                           <a:latin typeface="Calibri"/>
                         </a:rPr>
-                        <a:t>7</a:t>
+                        <a:t>15</a:t>
                       </a:r>
                     </a:p>
                   </a:txBody>
@@ -6315,7 +6419,7 @@
                           </a:solidFill>
                           <a:latin typeface="Calibri"/>
                         </a:rPr>
-                        <a:t>7</a:t>
+                        <a:t>15</a:t>
                       </a:r>
                     </a:p>
                   </a:txBody>
@@ -6479,7 +6583,7 @@
                 </a:solidFill>
                 <a:latin typeface="Calibri"/>
               </a:rPr>
-              <a:t>TOP DESTINATARIOS (31 pontos)</a:t>
+              <a:t>TOP DESTINATARIOS (65 pontos)</a:t>
             </a:r>
           </a:p>
         </p:txBody>
@@ -6754,7 +6858,7 @@
                           </a:solidFill>
                           <a:latin typeface="Calibri"/>
                         </a:rPr>
-                        <a:t>ANTARES CLUB SA HOTE - FLORIANOPOLIS / SC</a:t>
+                        <a:t>047817ELIANI APARECI - SAO JOAO BATISTA / SC</a:t>
                       </a:r>
                     </a:p>
                   </a:txBody>
@@ -6917,7 +7021,7 @@
                           </a:solidFill>
                           <a:latin typeface="Calibri"/>
                         </a:rPr>
-                        <a:t>CAMILA HOFFMANN - BIGUACU / SC</a:t>
+                        <a:t>ANA CAROLINA VIANNA - SANTANA DE PARNAIBA / SP</a:t>
                       </a:r>
                     </a:p>
                   </a:txBody>
@@ -7080,7 +7184,7 @@
                           </a:solidFill>
                           <a:latin typeface="Calibri"/>
                         </a:rPr>
-                        <a:t>CONCEPT MOBILITY SER - BARUERI / SP</a:t>
+                        <a:t>ANTARES CLUB SA HOTE - FLORIANOPOLIS / SC</a:t>
                       </a:r>
                     </a:p>
                   </a:txBody>
@@ -7243,7 +7347,7 @@
                           </a:solidFill>
                           <a:latin typeface="Calibri"/>
                         </a:rPr>
-                        <a:t>CONDOMINIO PERINI BU - JOINVILLE / SC</a:t>
+                        <a:t>AY MANUTENCAO INDUST - BARUERI / SP</a:t>
                       </a:r>
                     </a:p>
                   </a:txBody>
@@ -7406,7 +7510,7 @@
                           </a:solidFill>
                           <a:latin typeface="Calibri"/>
                         </a:rPr>
-                        <a:t>CONDOMINIO PODIUM VI - SAO PAULO / SP</a:t>
+                        <a:t>CAMILA HOFFMANN - BIGUACU / SC</a:t>
                       </a:r>
                     </a:p>
                   </a:txBody>
@@ -7569,7 +7673,7 @@
                           </a:solidFill>
                           <a:latin typeface="Calibri"/>
                         </a:rPr>
-                        <a:t>CONJUNTO RESIDENCIAL - SAO BERNARDO DO CAMPO / S</a:t>
+                        <a:t>COMPENSADOS NOVO MIL - BALNEARIO CAMBORIU / SC</a:t>
                       </a:r>
                     </a:p>
                   </a:txBody>
@@ -7732,7 +7836,7 @@
                           </a:solidFill>
                           <a:latin typeface="Calibri"/>
                         </a:rPr>
-                        <a:t>COROVA ROCHA SERVICO - BALNEARIO CAMBORIU / SC</a:t>
+                        <a:t>CONCEPT MOBILITY SER - BARUERI / SP</a:t>
                       </a:r>
                     </a:p>
                   </a:txBody>
@@ -7895,7 +7999,7 @@
                           </a:solidFill>
                           <a:latin typeface="Calibri"/>
                         </a:rPr>
-                        <a:t>CRISTIANE FERNANDES - GUARUJA / SP</a:t>
+                        <a:t>CONDOMINIO EDIFICIOS - SANTOS / SP</a:t>
                       </a:r>
                     </a:p>
                   </a:txBody>
@@ -7941,6 +8045,29 @@
                           </a:solidFill>
                           <a:latin typeface="Calibri"/>
                         </a:rPr>
+                        <a:t>1</a:t>
+                      </a:r>
+                    </a:p>
+                  </a:txBody>
+                  <a:tcPr>
+                    <a:solidFill>
+                      <a:srgbClr val="F2F2F2"/>
+                    </a:solidFill>
+                  </a:tcPr>
+                </a:tc>
+                <a:tc>
+                  <a:txBody>
+                    <a:bodyPr/>
+                    <a:lstStyle/>
+                    <a:p>
+                      <a:pPr algn="l"/>
+                      <a:r>
+                        <a:rPr sz="1000" b="0">
+                          <a:solidFill>
+                            <a:srgbClr val="1D1B43"/>
+                          </a:solidFill>
+                          <a:latin typeface="Calibri"/>
+                        </a:rPr>
                         <a:t>0</a:t>
                       </a:r>
                     </a:p>
@@ -7964,7 +8091,7 @@
                           </a:solidFill>
                           <a:latin typeface="Calibri"/>
                         </a:rPr>
-                        <a:t>1</a:t>
+                        <a:t>100.0%</a:t>
                       </a:r>
                     </a:p>
                   </a:txBody>
@@ -7987,30 +8114,7 @@
                           </a:solidFill>
                           <a:latin typeface="Calibri"/>
                         </a:rPr>
-                        <a:t>0.0%</a:t>
-                      </a:r>
-                    </a:p>
-                  </a:txBody>
-                  <a:tcPr>
-                    <a:solidFill>
-                      <a:srgbClr val="F2F2F2"/>
-                    </a:solidFill>
-                  </a:tcPr>
-                </a:tc>
-                <a:tc>
-                  <a:txBody>
-                    <a:bodyPr/>
-                    <a:lstStyle/>
-                    <a:p>
-                      <a:pPr algn="l"/>
-                      <a:r>
-                        <a:rPr sz="1000" b="0">
-                          <a:solidFill>
-                            <a:srgbClr val="1D1B43"/>
-                          </a:solidFill>
-                          <a:latin typeface="Calibri"/>
-                        </a:rPr>
-                        <a:t>Atencao</a:t>
+                        <a:t>Excelente</a:t>
                       </a:r>
                     </a:p>
                   </a:txBody>
@@ -8058,7 +8162,7 @@
                           </a:solidFill>
                           <a:latin typeface="Calibri"/>
                         </a:rPr>
-                        <a:t>DEBORA CRISTINA GONC - SAO BERNARDO DO CAMPO / S</a:t>
+                        <a:t>CONDOMINIO HORIZONTE - SAO PAULO / SP</a:t>
                       </a:r>
                     </a:p>
                   </a:txBody>
@@ -8221,7 +8325,7 @@
                           </a:solidFill>
                           <a:latin typeface="Calibri"/>
                         </a:rPr>
-                        <a:t>DEBORA MURTA LANA - SANTANA DE PARNAIBA / SP</a:t>
+                        <a:t>CONDOMINIO PERINI BU - JOINVILLE / SC</a:t>
                       </a:r>
                     </a:p>
                   </a:txBody>
@@ -8384,7 +8488,7 @@
                           </a:solidFill>
                           <a:latin typeface="Calibri"/>
                         </a:rPr>
-                        <a:t>EUNICE TERESINHA DA - SAO JOSE DOS CAMPOS / SP</a:t>
+                        <a:t>CONDOMINIO PODIUM VI - SAO PAULO / SP</a:t>
                       </a:r>
                     </a:p>
                   </a:txBody>
@@ -8547,7 +8651,7 @@
                           </a:solidFill>
                           <a:latin typeface="Calibri"/>
                         </a:rPr>
-                        <a:t>GEOVANE FARIA - SAO PAULO / SP</a:t>
+                        <a:t>CONJUNTO RESIDENCIAL - SAO BERNARDO DO CAMPO / S</a:t>
                       </a:r>
                     </a:p>
                   </a:txBody>
@@ -8710,7 +8814,7 @@
                           </a:solidFill>
                           <a:latin typeface="Calibri"/>
                         </a:rPr>
-                        <a:t>GREICE PIOTROVSKI - BARUERI / SP</a:t>
+                        <a:t>COROVA ROCHA SERVICO - BALNEARIO CAMBORIU / SC</a:t>
                       </a:r>
                     </a:p>
                   </a:txBody>
@@ -8873,7 +8977,7 @@
                           </a:solidFill>
                           <a:latin typeface="Calibri"/>
                         </a:rPr>
-                        <a:t>HELEN CRISTINA MADEI - CUBATAO / SP</a:t>
+                        <a:t>CRISTIANE FERNANDES - GUARUJA / SP</a:t>
                       </a:r>
                     </a:p>
                   </a:txBody>
@@ -8919,6 +9023,29 @@
                           </a:solidFill>
                           <a:latin typeface="Calibri"/>
                         </a:rPr>
+                        <a:t>0</a:t>
+                      </a:r>
+                    </a:p>
+                  </a:txBody>
+                  <a:tcPr>
+                    <a:solidFill>
+                      <a:srgbClr val="F2F2F2"/>
+                    </a:solidFill>
+                  </a:tcPr>
+                </a:tc>
+                <a:tc>
+                  <a:txBody>
+                    <a:bodyPr/>
+                    <a:lstStyle/>
+                    <a:p>
+                      <a:pPr algn="l"/>
+                      <a:r>
+                        <a:rPr sz="1000" b="0">
+                          <a:solidFill>
+                            <a:srgbClr val="1D1B43"/>
+                          </a:solidFill>
+                          <a:latin typeface="Calibri"/>
+                        </a:rPr>
                         <a:t>1</a:t>
                       </a:r>
                     </a:p>
@@ -8942,7 +9069,7 @@
                           </a:solidFill>
                           <a:latin typeface="Calibri"/>
                         </a:rPr>
-                        <a:t>0</a:t>
+                        <a:t>0.0%</a:t>
                       </a:r>
                     </a:p>
                   </a:txBody>
@@ -8965,30 +9092,7 @@
                           </a:solidFill>
                           <a:latin typeface="Calibri"/>
                         </a:rPr>
-                        <a:t>100.0%</a:t>
-                      </a:r>
-                    </a:p>
-                  </a:txBody>
-                  <a:tcPr>
-                    <a:solidFill>
-                      <a:srgbClr val="F2F2F2"/>
-                    </a:solidFill>
-                  </a:tcPr>
-                </a:tc>
-                <a:tc>
-                  <a:txBody>
-                    <a:bodyPr/>
-                    <a:lstStyle/>
-                    <a:p>
-                      <a:pPr algn="l"/>
-                      <a:r>
-                        <a:rPr sz="1000" b="0">
-                          <a:solidFill>
-                            <a:srgbClr val="1D1B43"/>
-                          </a:solidFill>
-                          <a:latin typeface="Calibri"/>
-                        </a:rPr>
-                        <a:t>Excelente</a:t>
+                        <a:t>Atencao</a:t>
                       </a:r>
                     </a:p>
                   </a:txBody>
